--- a/production/entregables/Meridiano_Programa_Ingreso.pptx
+++ b/production/entregables/Meridiano_Programa_Ingreso.pptx
@@ -2960,7 +2960,7 @@
               <a:buNone/>
             </a:pPr>
             <a:r>
-              <a:rPr lang="en-US" sz="1300" b="1" dirty="0">
+              <a:rPr lang="en-US" sz="1300" dirty="0">
                 <a:solidFill>
                   <a:srgbClr val="F3EDE3"/>
                 </a:solidFill>
@@ -2968,21 +2968,7 @@
                 <a:ea typeface="Poppins" pitchFamily="34" charset="-122"/>
                 <a:cs typeface="Poppins" pitchFamily="34" charset="-120"/>
               </a:rPr>
-              <a:t>+595 982 853 111</a:t>
-            </a:r>
-            <a:pPr indent="0" marL="0">
-              <a:buNone/>
-            </a:pPr>
-            <a:r>
-              <a:rPr lang="en-US" sz="1300" dirty="0">
-                <a:solidFill>
-                  <a:srgbClr val="F3EDE3"/>
-                </a:solidFill>
-                <a:latin typeface="Poppins" pitchFamily="34" charset="0"/>
-                <a:ea typeface="Poppins" pitchFamily="34" charset="-122"/>
-                <a:cs typeface="Poppins" pitchFamily="34" charset="-120"/>
-              </a:rPr>
-              <a:t>     ·     juancastillo@meridianocapital.net     ·     www.meridianocapital.net</a:t>
+              <a:t>+595 982 853 111     ·     juancastillo@meridianocapital.net     ·     www.meridianocapital.net</a:t>
             </a:r>
             <a:endParaRPr lang="en-US" sz="1300" dirty="0"/>
           </a:p>
